--- a/00.项目资料/活动运营中心建设方案_V1.1.pptx
+++ b/00.项目资料/活动运营中心建设方案_V1.1.pptx
@@ -8660,8 +8660,8 @@
         </p:nvSpPr>
         <p:spPr>
           <a:xfrm>
-            <a:off x="3840480" y="2697480"/>
-            <a:ext cx="1463040" cy="822960"/>
+            <a:off x="3840480" y="1838325"/>
+            <a:ext cx="1463040" cy="2759075"/>
           </a:xfrm>
           <a:prstGeom prst="rect">
             <a:avLst/>
@@ -8692,8 +8692,8 @@
         </p:nvSpPr>
         <p:spPr>
           <a:xfrm>
-            <a:off x="3840480" y="2697480"/>
-            <a:ext cx="1463040" cy="822960"/>
+            <a:off x="3840480" y="1737360"/>
+            <a:ext cx="1463040" cy="2874645"/>
           </a:xfrm>
           <a:prstGeom prst="rect">
             <a:avLst/>
@@ -9372,7 +9372,7 @@
       </p:sp>
       <p:sp>
         <p:nvSpPr>
-          <p:cNvPr id="30" name="Shape 28"/>
+          <p:cNvPr id="31" name="Text 29"/>
           <p:cNvSpPr/>
           <p:nvPr/>
         </p:nvSpPr>
@@ -9384,31 +9384,6 @@
           <a:prstGeom prst="rect">
             <a:avLst/>
           </a:prstGeom>
-          <a:solidFill>
-            <a:srgbClr val="065A82"/>
-          </a:solidFill>
-          <a:ln w="12700">
-            <a:solidFill>
-              <a:srgbClr val="065A82"/>
-            </a:solidFill>
-            <a:prstDash val="solid"/>
-          </a:ln>
-        </p:spPr>
-      </p:sp>
-      <p:sp>
-        <p:nvSpPr>
-          <p:cNvPr id="31" name="Text 29"/>
-          <p:cNvSpPr/>
-          <p:nvPr/>
-        </p:nvSpPr>
-        <p:spPr>
-          <a:xfrm>
-            <a:off x="457200" y="4425696"/>
-            <a:ext cx="2103120" cy="310896"/>
-          </a:xfrm>
-          <a:prstGeom prst="rect">
-            <a:avLst/>
-          </a:prstGeom>
           <a:noFill/>
         </p:spPr>
         <p:txBody>
@@ -9429,29 +9404,6 @@
             <a:endParaRPr lang="en-US" sz="1000" dirty="0"/>
           </a:p>
         </p:txBody>
-      </p:sp>
-      <p:sp>
-        <p:nvSpPr>
-          <p:cNvPr id="32" name="Shape 30"/>
-          <p:cNvSpPr/>
-          <p:nvPr/>
-        </p:nvSpPr>
-        <p:spPr>
-          <a:xfrm>
-            <a:off x="2560320" y="4581144"/>
-            <a:ext cx="1280160" cy="0"/>
-          </a:xfrm>
-          <a:prstGeom prst="line">
-            <a:avLst/>
-          </a:prstGeom>
-          <a:noFill/>
-          <a:ln w="15240">
-            <a:solidFill>
-              <a:srgbClr val="065A82"/>
-            </a:solidFill>
-            <a:prstDash val="solid"/>
-          </a:ln>
-        </p:spPr>
       </p:sp>
       <p:sp>
         <p:nvSpPr>
@@ -9531,7 +9483,7 @@
         </p:nvSpPr>
         <p:spPr>
           <a:xfrm>
-            <a:off x="6583680" y="1874520"/>
+            <a:off x="6583680" y="1717675"/>
             <a:ext cx="2103120" cy="310896"/>
           </a:xfrm>
           <a:prstGeom prst="rect">
@@ -9556,7 +9508,7 @@
         </p:nvSpPr>
         <p:spPr>
           <a:xfrm>
-            <a:off x="6583680" y="1874520"/>
+            <a:off x="6583680" y="1717675"/>
             <a:ext cx="2103120" cy="310896"/>
           </a:xfrm>
           <a:prstGeom prst="rect">
@@ -9591,7 +9543,7 @@
         </p:nvSpPr>
         <p:spPr>
           <a:xfrm>
-            <a:off x="5303520" y="2029968"/>
+            <a:off x="5303520" y="1873123"/>
             <a:ext cx="1280160" cy="0"/>
           </a:xfrm>
           <a:prstGeom prst="line">
@@ -9614,7 +9566,7 @@
         </p:nvSpPr>
         <p:spPr>
           <a:xfrm>
-            <a:off x="6583680" y="2286000"/>
+            <a:off x="6583680" y="2129155"/>
             <a:ext cx="2103120" cy="310896"/>
           </a:xfrm>
           <a:prstGeom prst="rect">
@@ -9639,7 +9591,7 @@
         </p:nvSpPr>
         <p:spPr>
           <a:xfrm>
-            <a:off x="6583680" y="2286000"/>
+            <a:off x="6583680" y="2129155"/>
             <a:ext cx="2103120" cy="310896"/>
           </a:xfrm>
           <a:prstGeom prst="rect">
@@ -9674,7 +9626,7 @@
         </p:nvSpPr>
         <p:spPr>
           <a:xfrm>
-            <a:off x="5303520" y="2441448"/>
+            <a:off x="5303520" y="2284603"/>
             <a:ext cx="1280160" cy="0"/>
           </a:xfrm>
           <a:prstGeom prst="line">
@@ -9697,7 +9649,7 @@
         </p:nvSpPr>
         <p:spPr>
           <a:xfrm>
-            <a:off x="6583680" y="2697480"/>
+            <a:off x="6583680" y="2540635"/>
             <a:ext cx="2103120" cy="310896"/>
           </a:xfrm>
           <a:prstGeom prst="rect">
@@ -9722,7 +9674,7 @@
         </p:nvSpPr>
         <p:spPr>
           <a:xfrm>
-            <a:off x="6583680" y="2697480"/>
+            <a:off x="6583680" y="2540635"/>
             <a:ext cx="2103120" cy="310896"/>
           </a:xfrm>
           <a:prstGeom prst="rect">
@@ -9757,7 +9709,7 @@
         </p:nvSpPr>
         <p:spPr>
           <a:xfrm>
-            <a:off x="5303520" y="2852928"/>
+            <a:off x="5303520" y="2696083"/>
             <a:ext cx="1280160" cy="0"/>
           </a:xfrm>
           <a:prstGeom prst="line">
@@ -9780,7 +9732,7 @@
         </p:nvSpPr>
         <p:spPr>
           <a:xfrm>
-            <a:off x="6583680" y="3108960"/>
+            <a:off x="6583680" y="2952115"/>
             <a:ext cx="2103120" cy="310896"/>
           </a:xfrm>
           <a:prstGeom prst="rect">
@@ -9805,7 +9757,7 @@
         </p:nvSpPr>
         <p:spPr>
           <a:xfrm>
-            <a:off x="6583680" y="3108960"/>
+            <a:off x="6583680" y="2952115"/>
             <a:ext cx="2103120" cy="310896"/>
           </a:xfrm>
           <a:prstGeom prst="rect">
@@ -9840,7 +9792,7 @@
         </p:nvSpPr>
         <p:spPr>
           <a:xfrm>
-            <a:off x="5303520" y="3264408"/>
+            <a:off x="5303520" y="3107563"/>
             <a:ext cx="1280160" cy="0"/>
           </a:xfrm>
           <a:prstGeom prst="line">
@@ -9863,7 +9815,7 @@
         </p:nvSpPr>
         <p:spPr>
           <a:xfrm>
-            <a:off x="6583680" y="3520440"/>
+            <a:off x="6583680" y="3363595"/>
             <a:ext cx="2103120" cy="310896"/>
           </a:xfrm>
           <a:prstGeom prst="rect">
@@ -9888,7 +9840,7 @@
         </p:nvSpPr>
         <p:spPr>
           <a:xfrm>
-            <a:off x="6583680" y="3520440"/>
+            <a:off x="6583680" y="3363595"/>
             <a:ext cx="2103120" cy="310896"/>
           </a:xfrm>
           <a:prstGeom prst="rect">
@@ -9923,7 +9875,7 @@
         </p:nvSpPr>
         <p:spPr>
           <a:xfrm>
-            <a:off x="5303520" y="3675888"/>
+            <a:off x="5303520" y="3519043"/>
             <a:ext cx="1280160" cy="0"/>
           </a:xfrm>
           <a:prstGeom prst="line">
@@ -9946,7 +9898,7 @@
         </p:nvSpPr>
         <p:spPr>
           <a:xfrm>
-            <a:off x="6583680" y="3931920"/>
+            <a:off x="6583680" y="3775075"/>
             <a:ext cx="2103120" cy="310896"/>
           </a:xfrm>
           <a:prstGeom prst="rect">
@@ -9971,7 +9923,7 @@
         </p:nvSpPr>
         <p:spPr>
           <a:xfrm>
-            <a:off x="6583680" y="3931920"/>
+            <a:off x="6583680" y="3775075"/>
             <a:ext cx="2103120" cy="310896"/>
           </a:xfrm>
           <a:prstGeom prst="rect">
@@ -10006,7 +9958,7 @@
         </p:nvSpPr>
         <p:spPr>
           <a:xfrm>
-            <a:off x="5303520" y="4087368"/>
+            <a:off x="5303520" y="3930523"/>
             <a:ext cx="1280160" cy="0"/>
           </a:xfrm>
           <a:prstGeom prst="line">
@@ -10029,7 +9981,7 @@
         </p:nvSpPr>
         <p:spPr>
           <a:xfrm>
-            <a:off x="6583680" y="4343400"/>
+            <a:off x="6583680" y="4186555"/>
             <a:ext cx="2103120" cy="310896"/>
           </a:xfrm>
           <a:prstGeom prst="rect">
@@ -10054,7 +10006,7 @@
         </p:nvSpPr>
         <p:spPr>
           <a:xfrm>
-            <a:off x="6583680" y="4343400"/>
+            <a:off x="6583680" y="4186555"/>
             <a:ext cx="2103120" cy="310896"/>
           </a:xfrm>
           <a:prstGeom prst="rect">
@@ -10089,7 +10041,7 @@
         </p:nvSpPr>
         <p:spPr>
           <a:xfrm>
-            <a:off x="5303520" y="4498848"/>
+            <a:off x="5303520" y="4342003"/>
             <a:ext cx="1280160" cy="0"/>
           </a:xfrm>
           <a:prstGeom prst="line">
